--- a/강의자료/원자력 세상_초등 3-4학년용.pptx
+++ b/강의자료/원자력 세상_초등 3-4학년용.pptx
@@ -813,7 +813,7 @@
           <a:lstStyle/>
           <a:p>
             <a:r>
-              <a:t>(영상 시청 시간, 3~5분)</a:t>
+              <a:t>(영상 시청 시간, 3~4분)</a:t>
             </a:r>
           </a:p>
           <a:p>
@@ -828,12 +828,12 @@
           </a:p>
           <a:p>
             <a:r>
-              <a:t>오른쪽 카드를 누르면 원자를 쉽게 설명해 주는 영상들을 찾을 수 있어요.</a:t>
-            </a:r>
-          </a:p>
-          <a:p>
-            <a:r>
-              <a:t>(수업 전에 미리 영상을 하나 골라 두고, 링크가 잘 열리는지 확인해 주세요. 3~4분짜리 영상 하나면 충분해요.)</a:t>
+              <a:t>오른쪽 카드를 누르면 어린이 눈높이의 4분 이내 짧은 영상만 골라서 보여줘요.</a:t>
+            </a:r>
+          </a:p>
+          <a:p>
+            <a:r>
+              <a:t>(수업 전에 미리 영상을 하나 골라 두세요. 3~4분짜리 영상 하나면 충분해요.)</a:t>
             </a:r>
           </a:p>
           <a:p>
@@ -1188,7 +1188,7 @@
           <a:lstStyle/>
           <a:p>
             <a:r>
-              <a:t>(영상 시청 시간, 3~5분)</a:t>
+              <a:t>(영상 시청 시간, 3~4분)</a:t>
             </a:r>
           </a:p>
           <a:p>
@@ -1198,7 +1198,7 @@
           </a:p>
           <a:p>
             <a:r>
-              <a:t>왼쪽 카드를 클릭하면 원자력발전소가 어떻게 움직이는지 그림으로 쉽게 보여주는 영상이 나와요.</a:t>
+              <a:t>카드를 클릭하면 4분 이내의 짧은 영상만 골라서 보여주도록 되어 있어요. 그중에 그림이 예쁘고 쉬운 것을 하나 고르면 됩니다.</a:t>
             </a:r>
           </a:p>
           <a:p>
@@ -1208,7 +1208,7 @@
           </a:p>
           <a:p>
             <a:r>
-              <a:t>(수업 전에 링크가 잘 열리는지 꼭 확인해 주세요. 영상이 길면 앞부분 3분만 보여줘도 좋아요.)</a:t>
+              <a:t>(수업 전에 영상을 미리 하나 골라 두세요. 검색 결과에는 '4분 이내' 필터가 걸려 있어요.)</a:t>
             </a:r>
           </a:p>
           <a:p>
@@ -1478,12 +1478,12 @@
           </a:p>
           <a:p>
             <a:r>
-              <a:t>다만! 한꺼번에 너무 많이 받으면 몸에 안 좋아요. 그래서 과학자들이 특별한 기계로 방사선을 늘 재면서 안전하게 지키고 있어요.</a:t>
-            </a:r>
-          </a:p>
-          <a:p>
-            <a:r>
-              <a:t>햇볕도 적당히 쬐면 좋지만 너무 오래 쬐면 살이 타는 것과 비슷해요.</a:t>
+              <a:t>게다가 과학자들이 특별한 기계로 방사선을 늘 재면서 우리를 안전하게 지켜주고 있으니 안심해도 돼요.</a:t>
+            </a:r>
+          </a:p>
+          <a:p>
+            <a:r>
+              <a:t>햇볕을 적당히 쬐면 몸도 튼튼해지고 기분도 좋아지는 것처럼, 방사선도 잘 알고 쓰면 우리에게 큰 도움이 된답니다. 다음 장에서 확인해 볼까요?</a:t>
             </a:r>
           </a:p>
         </p:txBody>
@@ -1743,12 +1743,12 @@
           <a:lstStyle/>
           <a:p>
             <a:r>
-              <a:t>"그래도 발전소가 고장 나면 어떡해요?" 하고 걱정하는 친구가 있을 거예요. 좋은 질문이에요!</a:t>
-            </a:r>
-          </a:p>
-          <a:p>
-            <a:r>
-              <a:t>그래서 원자력발전소는 갑옷을 입고 있어요. 그것도 다섯 겹이나!</a:t>
+              <a:t>"발전소는 튼튼한가요?" 하고 궁금한 친구가 있을 거예요. 좋은 질문이에요!</a:t>
+            </a:r>
+          </a:p>
+          <a:p>
+            <a:r>
+              <a:t>원자력발전소는 세상에서 제일 튼튼한 갑옷을 입고 있어요. 그것도 다섯 겹이나!</a:t>
             </a:r>
           </a:p>
           <a:p>
@@ -2123,7 +2123,7 @@
           </a:p>
           <a:p>
             <a:r>
-              <a:t>왼쪽은 우리나라 인공태양 KSTAR가 세계 기록을 세웠다는 뉴스 영상이고, 오른쪽은 KSTAR 실험이 실제로 어떻게 진행되는지 보여주는 영상이에요.</a:t>
+              <a:t>왼쪽은 우리나라 인공태양 KSTAR가 세계 기록을 세웠다는 약 2분짜리 뉴스 영상이고, 오른쪽 카드는 4분 이내의 짧은 KSTAR 영상만 골라서 보여줘요.</a:t>
             </a:r>
           </a:p>
           <a:p>
@@ -2133,7 +2133,7 @@
           </a:p>
           <a:p>
             <a:r>
-              <a:t>(수업 전에 링크 확인해 주세요. 뉴스 영상은 2분 정도로 짧아서 보여주기 좋아요.)</a:t>
+              <a:t>(수업 전에 영상을 미리 골라 두세요. 뉴스 영상은 2분 정도로 짧아서 보여주기 좋아요.)</a:t>
             </a:r>
           </a:p>
         </p:txBody>
@@ -2213,12 +2213,12 @@
           </a:p>
           <a:p>
             <a:r>
-              <a:t>한국원자력연구원, 한수원, 원자력안전위원회 채널에서는 진짜 과학자들과 발전소 이야기를 볼 수 있고요.</a:t>
-            </a:r>
-          </a:p>
-          <a:p>
-            <a:r>
-              <a:t>'아꿈선 초등3분과학'은 초등학교 선생님들이 만든 3분짜리 과학 영상 채널이라 우리 친구들 눈높이에 딱 맞아요.</a:t>
+              <a:t>'EBS 클립뱅크'는 5분 이내의 짧은 교육 영상만 모아둔 EBS 공식 채널이고, '아꿈선 초등3분과학'은 초등학교 선생님들이 만든 3분짜리 과학 영상 채널이라 우리 친구들 눈높이에 딱 맞아요.</a:t>
+            </a:r>
+          </a:p>
+          <a:p>
+            <a:r>
+              <a:t>검색 카드에는 모두 '4분 이내 영상만 보기' 필터가 걸려 있어서 짧고 쉬운 영상만 나와요.</a:t>
             </a:r>
           </a:p>
           <a:p>
@@ -7268,7 +7268,7 @@
                 <a:latin typeface="Malgun Gothic"/>
                 <a:ea typeface="Malgun Gothic"/>
               </a:rPr>
-              <a:t>🟡  전자</a:t>
+              <a:t>●  전자</a:t>
             </a:r>
           </a:p>
           <a:p>
@@ -8447,7 +8447,7 @@
                 <a:latin typeface="Malgun Gothic"/>
                 <a:ea typeface="Malgun Gothic"/>
               </a:rPr>
-              <a:t>원자력연구원의 귀여운 캐릭터 '원연이'가</a:t>
+              <a:t>귀여운 캐릭터 '원연이'가 나오는</a:t>
             </a:r>
             <a:br/>
             <a:r>
@@ -8458,7 +8458,7 @@
                 <a:latin typeface="Malgun Gothic"/>
                 <a:ea typeface="Malgun Gothic"/>
               </a:rPr>
-              <a:t>원자력 이야기를 쉽게 들려줘요</a:t>
+              <a:t>짧고 쉬운 원자력 영상 채널이에요</a:t>
             </a:r>
           </a:p>
         </p:txBody>
@@ -8543,7 +8543,7 @@
                 <a:latin typeface="Malgun Gothic"/>
                 <a:ea typeface="Malgun Gothic"/>
               </a:rPr>
-              <a:t>유튜브에서 찾아봐요</a:t>
+              <a:t>4분 이내 짧은 영상만 모았어요</a:t>
             </a:r>
           </a:p>
           <a:p>
@@ -8583,7 +8583,7 @@
                 <a:latin typeface="Malgun Gothic"/>
                 <a:ea typeface="Malgun Gothic"/>
               </a:rPr>
-              <a:t>클릭하면 원자를 쉽게 설명해 주는</a:t>
+              <a:t>클릭하면 어린이 눈높이의 짧은 영상만</a:t>
             </a:r>
             <a:br/>
             <a:r>
@@ -8594,7 +8594,7 @@
                 <a:latin typeface="Malgun Gothic"/>
                 <a:ea typeface="Malgun Gothic"/>
               </a:rPr>
-              <a:t>영상들이 주르륵 나와요</a:t>
+              <a:t>골라서 보여줘요</a:t>
             </a:r>
           </a:p>
         </p:txBody>
@@ -8637,7 +8637,7 @@
                 <a:latin typeface="Malgun Gothic"/>
                 <a:ea typeface="Malgun Gothic"/>
               </a:rPr>
-              <a:t>카드를 클릭하면 유튜브로 이동해요 🖱️</a:t>
+              <a:t>카드를 클릭하면 유튜브로 이동해요 👆</a:t>
             </a:r>
           </a:p>
         </p:txBody>
@@ -8742,7 +8742,7 @@
                 <a:latin typeface="Malgun Gothic"/>
                 <a:ea typeface="Malgun Gothic"/>
               </a:rPr>
-              <a:t>🧠 깜짝 퀴즈 타임! (1)</a:t>
+              <a:t>❓ 깜짝 퀴즈 타임! (1)</a:t>
             </a:r>
           </a:p>
         </p:txBody>
@@ -9399,7 +9399,7 @@
                 <a:latin typeface="Malgun Gothic"/>
                 <a:ea typeface="Malgun Gothic"/>
               </a:rPr>
-              <a:t>♨️</a:t>
+              <a:t>💨</a:t>
             </a:r>
           </a:p>
           <a:p>
@@ -10039,7 +10039,7 @@
                 <a:latin typeface="Malgun Gothic"/>
                 <a:ea typeface="Malgun Gothic"/>
               </a:rPr>
-              <a:t>추천 영상</a:t>
+              <a:t>4분 이내 짧은 영상만 모았어요</a:t>
             </a:r>
           </a:p>
           <a:p>
@@ -10070,7 +10070,7 @@
                 <a:latin typeface="Malgun Gothic"/>
                 <a:ea typeface="Malgun Gothic"/>
               </a:rPr>
-              <a:t>어떻게 작동할까? [1편]</a:t>
+              <a:t>어떻게 전기를 만들까?</a:t>
             </a:r>
           </a:p>
           <a:p>
@@ -10090,7 +10090,7 @@
                 <a:latin typeface="Malgun Gothic"/>
                 <a:ea typeface="Malgun Gothic"/>
               </a:rPr>
-              <a:t>발전소가 전기를 만드는 과정을</a:t>
+              <a:t>어린이 눈높이의 짧은 애니메이션만</a:t>
             </a:r>
             <a:br/>
             <a:r>
@@ -10101,7 +10101,7 @@
                 <a:latin typeface="Malgun Gothic"/>
                 <a:ea typeface="Malgun Gothic"/>
               </a:rPr>
-              <a:t>그림으로 쉽게 보여줘요</a:t>
+              <a:t>골라서 보여줘요</a:t>
             </a:r>
           </a:p>
         </p:txBody>
@@ -10186,7 +10186,7 @@
                 <a:latin typeface="Malgun Gothic"/>
                 <a:ea typeface="Malgun Gothic"/>
               </a:rPr>
-              <a:t>더 찾아봐요</a:t>
+              <a:t>4분 이내 짧은 영상만 모았어요</a:t>
             </a:r>
           </a:p>
           <a:p>
@@ -10206,7 +10206,18 @@
                 <a:latin typeface="Malgun Gothic"/>
                 <a:ea typeface="Malgun Gothic"/>
               </a:rPr>
-              <a:t>"원자력발전소 원리"</a:t>
+              <a:t>전기는 어떻게</a:t>
+            </a:r>
+            <a:br/>
+            <a:r>
+              <a:rPr sz="1800" b="1">
+                <a:solidFill>
+                  <a:srgbClr val="FFFFFF"/>
+                </a:solidFill>
+                <a:latin typeface="Malgun Gothic"/>
+                <a:ea typeface="Malgun Gothic"/>
+              </a:rPr>
+              <a:t>만들어질까?</a:t>
             </a:r>
           </a:p>
           <a:p>
@@ -10226,7 +10237,7 @@
                 <a:latin typeface="Malgun Gothic"/>
                 <a:ea typeface="Malgun Gothic"/>
               </a:rPr>
-              <a:t>클릭하면 발전소 원리를 보여주는</a:t>
+              <a:t>바람개비(터빈)가 전기를 만드는 모습을</a:t>
             </a:r>
             <a:br/>
             <a:r>
@@ -10237,7 +10248,7 @@
                 <a:latin typeface="Malgun Gothic"/>
                 <a:ea typeface="Malgun Gothic"/>
               </a:rPr>
-              <a:t>애니메이션 영상들이 나와요</a:t>
+              <a:t>짧은 영상으로 볼 수 있어요</a:t>
             </a:r>
           </a:p>
         </p:txBody>
@@ -10280,7 +10291,7 @@
                 <a:latin typeface="Malgun Gothic"/>
                 <a:ea typeface="Malgun Gothic"/>
               </a:rPr>
-              <a:t>카드를 클릭하면 유튜브로 이동해요 🖱️</a:t>
+              <a:t>카드를 클릭하면 유튜브로 이동해요 👆</a:t>
             </a:r>
           </a:p>
         </p:txBody>
@@ -10770,7 +10781,7 @@
                 <a:latin typeface="Malgun Gothic"/>
                 <a:ea typeface="Malgun Gothic"/>
               </a:rPr>
-              <a:t>그래서 세계 30개가 넘는 나라들이 원자력발전소를 쓰고 있어요. 우리나라 기술은 세계 최고 수준! 🇰🇷</a:t>
+              <a:t>그래서 세계 30개가 넘는 나라들이 원자력발전소를 쓰고 있어요. 우리나라 기술은 세계 최고 수준! 👍</a:t>
             </a:r>
           </a:p>
         </p:txBody>
@@ -10875,7 +10886,7 @@
                 <a:latin typeface="Malgun Gothic"/>
                 <a:ea typeface="Malgun Gothic"/>
               </a:rPr>
-              <a:t>🛡️</a:t>
+              <a:t>🏰</a:t>
             </a:r>
           </a:p>
           <a:p>
@@ -10935,7 +10946,7 @@
                 <a:latin typeface="Malgun Gothic"/>
                 <a:ea typeface="Malgun Gothic"/>
               </a:rPr>
-              <a:t>알고 보면 무섭지 않아요!</a:t>
+              <a:t>알고 보면 고마운 친구!</a:t>
             </a:r>
           </a:p>
         </p:txBody>
@@ -11040,7 +11051,7 @@
                 <a:latin typeface="Malgun Gothic"/>
                 <a:ea typeface="Malgun Gothic"/>
               </a:rPr>
-              <a:t>방사선? 알고 보면 우리 곁에 있어요 🌞</a:t>
+              <a:t>방사선? 알고 보면 고마운 친구예요 🌞</a:t>
             </a:r>
           </a:p>
         </p:txBody>
@@ -11103,7 +11114,7 @@
                 <a:latin typeface="Malgun Gothic"/>
                 <a:ea typeface="Malgun Gothic"/>
               </a:rPr>
-              <a:t>🕷️ 💚</a:t>
+              <a:t>🎬 💚</a:t>
             </a:r>
           </a:p>
           <a:p>
@@ -11237,7 +11248,7 @@
                 <a:latin typeface="Malgun Gothic"/>
                 <a:ea typeface="Malgun Gothic"/>
               </a:rPr>
-              <a:t>☀️ 🍌 🏔️</a:t>
+              <a:t>☀️ 🍌 🗻</a:t>
             </a:r>
           </a:p>
           <a:p>
@@ -11351,7 +11362,7 @@
                 <a:latin typeface="Malgun Gothic"/>
                 <a:ea typeface="Malgun Gothic"/>
               </a:rPr>
-              <a:t>다만 한꺼번에 너무 많이 받으면 몸에 안 좋아서, 과학자들이 기계로 늘 재면서 지키고 있어요 🔬</a:t>
+              <a:t>과학자들이 특별한 기계로 방사선을 늘 재면서 우리를 안전하게 지켜주고 있어요. 안심! 🔬</a:t>
             </a:r>
           </a:p>
         </p:txBody>
@@ -11456,7 +11467,7 @@
                 <a:latin typeface="Malgun Gothic"/>
                 <a:ea typeface="Malgun Gothic"/>
               </a:rPr>
-              <a:t>오늘의 탐험 지도 🗺️</a:t>
+              <a:t>오늘의 탐험 지도 🚩</a:t>
             </a:r>
           </a:p>
         </p:txBody>
@@ -11848,7 +11859,7 @@
                 <a:latin typeface="Malgun Gothic"/>
                 <a:ea typeface="Malgun Gothic"/>
               </a:rPr>
-              <a:t>🛡️</a:t>
+              <a:t>🏰</a:t>
             </a:r>
           </a:p>
           <a:p>
@@ -12014,7 +12025,7 @@
                 <a:latin typeface="Malgun Gothic"/>
                 <a:ea typeface="Malgun Gothic"/>
               </a:rPr>
-              <a:t>다섯 개의 코스를 모두 통과하면, 여러분도 오늘부터 꼬마 원자력 박사! 👨‍🔬👩‍🔬</a:t>
+              <a:t>다섯 개의 코스를 모두 통과하면, 여러분도 오늘부터 꼬마 원자력 박사! 🎓</a:t>
             </a:r>
           </a:p>
         </p:txBody>
@@ -12410,7 +12421,7 @@
                 <a:latin typeface="Malgun Gothic"/>
                 <a:ea typeface="Malgun Gothic"/>
               </a:rPr>
-              <a:t>🥔</a:t>
+              <a:t>🌱</a:t>
             </a:r>
           </a:p>
           <a:p>
@@ -12723,7 +12734,7 @@
                 <a:latin typeface="Malgun Gothic"/>
                 <a:ea typeface="Malgun Gothic"/>
               </a:rPr>
-              <a:t>다섯 겹 갑옷을 입은 발전소 🛡️</a:t>
+              <a:t>다섯 겹 갑옷을 입은 발전소 🏰</a:t>
             </a:r>
           </a:p>
         </p:txBody>
@@ -13359,7 +13370,7 @@
                 <a:latin typeface="Malgun Gothic"/>
                 <a:ea typeface="Malgun Gothic"/>
               </a:rPr>
-              <a:t>혹시 모를 사고에도 방사선이 밖으로 나오지 못하게, 겹겹이 지키고 있어요!</a:t>
+              <a:t>언제나 안심할 수 있도록 다섯 겹으로 튼튼하게! 과학자들이 24시간 지키고 있어요!</a:t>
             </a:r>
           </a:p>
         </p:txBody>
@@ -13464,7 +13475,7 @@
                 <a:latin typeface="Malgun Gothic"/>
                 <a:ea typeface="Malgun Gothic"/>
               </a:rPr>
-              <a:t>🧠 깜짝 퀴즈 타임! (2)</a:t>
+              <a:t>❓ 깜짝 퀴즈 타임! (2)</a:t>
             </a:r>
           </a:p>
         </p:txBody>
@@ -14443,7 +14454,7 @@
                 <a:latin typeface="Malgun Gothic"/>
                 <a:ea typeface="Malgun Gothic"/>
               </a:rPr>
-              <a:t>이 모든 걸 한국원자력연구원의 과학자들이 열심히 연구하고 있어요! 🇰🇷</a:t>
+              <a:t>이 모든 걸 한국원자력연구원의 과학자들이 열심히 연구하고 있어요! ✨</a:t>
             </a:r>
           </a:p>
         </p:txBody>
@@ -14633,7 +14644,7 @@
                 <a:latin typeface="Malgun Gothic"/>
                 <a:ea typeface="Malgun Gothic"/>
               </a:rPr>
-              <a:t>YTN 뉴스</a:t>
+              <a:t>YTN 뉴스 (약 2분)</a:t>
             </a:r>
           </a:p>
           <a:p>
@@ -14695,7 +14706,7 @@
                 <a:latin typeface="Malgun Gothic"/>
                 <a:ea typeface="Malgun Gothic"/>
               </a:rPr>
-              <a:t>세계 최초 기록 이야기</a:t>
+              <a:t>세계 최초 기록, 2분 뉴스 영상</a:t>
             </a:r>
           </a:p>
         </p:txBody>
@@ -14780,7 +14791,7 @@
                 <a:latin typeface="Malgun Gothic"/>
                 <a:ea typeface="Malgun Gothic"/>
               </a:rPr>
-              <a:t>한국핵융합에너지연구원</a:t>
+              <a:t>4분 이내 짧은 영상만 모았어요</a:t>
             </a:r>
           </a:p>
           <a:p>
@@ -14800,30 +14811,30 @@
                 <a:latin typeface="Malgun Gothic"/>
                 <a:ea typeface="Malgun Gothic"/>
               </a:rPr>
-              <a:t>KSTAR 실험은</a:t>
+              <a:t>"인공태양 KSTAR"</a:t>
+            </a:r>
+          </a:p>
+          <a:p>
+            <a:pPr algn="ctr">
+              <a:lnSpc>
+                <a:spcPct val="115000"/>
+              </a:lnSpc>
+              <a:spcAft>
+                <a:spcPts val="400"/>
+              </a:spcAft>
+            </a:pPr>
+            <a:r>
+              <a:rPr sz="1300" b="0">
+                <a:solidFill>
+                  <a:srgbClr val="C5CDE8"/>
+                </a:solidFill>
+                <a:latin typeface="Malgun Gothic"/>
+                <a:ea typeface="Malgun Gothic"/>
+              </a:rPr>
+              <a:t>진짜 인공태양의 모습을</a:t>
             </a:r>
             <a:br/>
             <a:r>
-              <a:rPr sz="1800" b="1">
-                <a:solidFill>
-                  <a:srgbClr val="FFFFFF"/>
-                </a:solidFill>
-                <a:latin typeface="Malgun Gothic"/>
-                <a:ea typeface="Malgun Gothic"/>
-              </a:rPr>
-              <a:t>어떻게 진행될까?</a:t>
-            </a:r>
-          </a:p>
-          <a:p>
-            <a:pPr algn="ctr">
-              <a:lnSpc>
-                <a:spcPct val="115000"/>
-              </a:lnSpc>
-              <a:spcAft>
-                <a:spcPts val="400"/>
-              </a:spcAft>
-            </a:pPr>
-            <a:r>
               <a:rPr sz="1300" b="0">
                 <a:solidFill>
                   <a:srgbClr val="C5CDE8"/>
@@ -14831,18 +14842,7 @@
                 <a:latin typeface="Malgun Gothic"/>
                 <a:ea typeface="Malgun Gothic"/>
               </a:rPr>
-              <a:t>진짜 인공태양 실험 모습을</a:t>
-            </a:r>
-            <a:br/>
-            <a:r>
-              <a:rPr sz="1300" b="0">
-                <a:solidFill>
-                  <a:srgbClr val="C5CDE8"/>
-                </a:solidFill>
-                <a:latin typeface="Malgun Gothic"/>
-                <a:ea typeface="Malgun Gothic"/>
-              </a:rPr>
-              <a:t>직접 볼 수 있어요</a:t>
+              <a:t>짧은 영상으로 골라 볼 수 있어요</a:t>
             </a:r>
           </a:p>
         </p:txBody>
@@ -14885,7 +14885,7 @@
                 <a:latin typeface="Malgun Gothic"/>
                 <a:ea typeface="Malgun Gothic"/>
               </a:rPr>
-              <a:t>카드를 클릭하면 유튜브로 이동해요 🖱️</a:t>
+              <a:t>카드를 클릭하면 유튜브로 이동해요 👆</a:t>
             </a:r>
           </a:p>
         </p:txBody>
@@ -15055,7 +15055,7 @@
                 <a:latin typeface="Malgun Gothic"/>
                 <a:ea typeface="Malgun Gothic"/>
               </a:rPr>
-              <a:t>🧪</a:t>
+              <a:t>🔬</a:t>
             </a:r>
           </a:p>
           <a:p>
@@ -15173,7 +15173,7 @@
                 <a:latin typeface="Malgun Gothic"/>
                 <a:ea typeface="Malgun Gothic"/>
               </a:rPr>
-              <a:t>🏛️</a:t>
+              <a:t>🏢</a:t>
             </a:r>
           </a:p>
           <a:p>
@@ -15409,7 +15409,7 @@
                 <a:latin typeface="Malgun Gothic"/>
                 <a:ea typeface="Malgun Gothic"/>
               </a:rPr>
-              <a:t>🛡️</a:t>
+              <a:t>📺</a:t>
             </a:r>
           </a:p>
           <a:p>
@@ -15429,7 +15429,7 @@
                 <a:latin typeface="Malgun Gothic"/>
                 <a:ea typeface="Malgun Gothic"/>
               </a:rPr>
-              <a:t>원자력안전위원회</a:t>
+              <a:t>EBS 클립뱅크</a:t>
             </a:r>
           </a:p>
           <a:p>
@@ -15450,7 +15450,7 @@
                 <a:ea typeface="Malgun Gothic"/>
                 <a:hlinkClick r:id="rId5"/>
               </a:rPr>
-              <a:t>원자력을 안전하게 지키는</a:t>
+              <a:t>5분 이내 교육 영상 전문!</a:t>
             </a:r>
             <a:br/>
             <a:r>
@@ -15462,7 +15462,7 @@
                 <a:ea typeface="Malgun Gothic"/>
                 <a:hlinkClick r:id="rId5"/>
               </a:rPr>
-              <a:t>어른들의 이야기</a:t>
+              <a:t>'원자력'을 검색해 보세요</a:t>
             </a:r>
           </a:p>
         </p:txBody>
@@ -15665,7 +15665,7 @@
                 <a:latin typeface="Malgun Gothic"/>
                 <a:ea typeface="Malgun Gothic"/>
               </a:rPr>
-              <a:t>유튜브 검색: 생활 속 방사선</a:t>
+              <a:t>생활 속 방사선 (짧은 영상)</a:t>
             </a:r>
           </a:p>
           <a:p>
@@ -15686,7 +15686,7 @@
                 <a:ea typeface="Malgun Gothic"/>
                 <a:hlinkClick r:id="rId7"/>
               </a:rPr>
-              <a:t>우리 주변 방사선 이야기를</a:t>
+              <a:t>우리 곁의 고마운 방사선 이야기,</a:t>
             </a:r>
             <a:br/>
             <a:r>
@@ -15698,7 +15698,7 @@
                 <a:ea typeface="Malgun Gothic"/>
                 <a:hlinkClick r:id="rId7"/>
               </a:rPr>
-              <a:t>더 찾아볼 수 있어요</a:t>
+              <a:t>4분 이내 영상만 골라 봐요</a:t>
             </a:r>
           </a:p>
         </p:txBody>
@@ -15741,7 +15741,7 @@
                 <a:latin typeface="Malgun Gothic"/>
                 <a:ea typeface="Malgun Gothic"/>
               </a:rPr>
-              <a:t>집에 가서 부모님과 함께 보세요! 카드를 클릭하면 채널로 이동해요 🖱️</a:t>
+              <a:t>집에 가서 부모님과 함께 보세요! 카드를 클릭하면 채널로 이동해요 👆</a:t>
             </a:r>
           </a:p>
         </p:txBody>
@@ -16242,7 +16242,7 @@
                 <a:latin typeface="Malgun Gothic"/>
                 <a:ea typeface="Malgun Gothic"/>
               </a:rPr>
-              <a:t>오늘의 탐험 완료! 🏅</a:t>
+              <a:t>오늘의 탐험 완료! 🏆</a:t>
             </a:r>
           </a:p>
         </p:txBody>
@@ -16496,7 +16496,7 @@
                 <a:latin typeface="Malgun Gothic"/>
                 <a:ea typeface="Malgun Gothic"/>
               </a:rPr>
-              <a:t>🛡️  </a:t>
+              <a:t>🏰  </a:t>
             </a:r>
             <a:r>
               <a:rPr sz="1500" b="1">
@@ -17616,7 +17616,7 @@
                 <a:latin typeface="Malgun Gothic"/>
                 <a:ea typeface="Malgun Gothic"/>
               </a:rPr>
-              <a:t>⛰️</a:t>
+              <a:t>🗻</a:t>
             </a:r>
           </a:p>
           <a:p>
@@ -18530,7 +18530,7 @@
                 <a:latin typeface="Malgun Gothic"/>
                 <a:ea typeface="Malgun Gothic"/>
               </a:rPr>
-              <a:t>🛢️</a:t>
+              <a:t>⛽</a:t>
             </a:r>
           </a:p>
           <a:p>
@@ -18688,7 +18688,7 @@
                 <a:latin typeface="Malgun Gothic"/>
                 <a:ea typeface="Malgun Gothic"/>
               </a:rPr>
-              <a:t>⚛️</a:t>
+              <a:t>🌟</a:t>
             </a:r>
           </a:p>
           <a:p>
@@ -18782,7 +18782,7 @@
                 <a:latin typeface="Malgun Gothic"/>
                 <a:ea typeface="Malgun Gothic"/>
               </a:rPr>
-              <a:t>그리고 오늘의 주인공은 바로... 원자력이에요! ⚛️</a:t>
+              <a:t>그리고 오늘의 주인공은 바로... 원자력이에요! ⚡</a:t>
             </a:r>
           </a:p>
         </p:txBody>
@@ -19052,7 +19052,7 @@
                 <a:latin typeface="Malgun Gothic"/>
                 <a:ea typeface="Malgun Gothic"/>
               </a:rPr>
-              <a:t>세상 모든 것은 '원자 블록'으로 만들어졌어요 🧱</a:t>
+              <a:t>세상 모든 것은 '원자 블록'으로 만들어졌어요 🎲</a:t>
             </a:r>
           </a:p>
         </p:txBody>
@@ -19115,7 +19115,7 @@
                 <a:latin typeface="Malgun Gothic"/>
                 <a:ea typeface="Malgun Gothic"/>
               </a:rPr>
-              <a:t>🧸</a:t>
+              <a:t>📖</a:t>
             </a:r>
           </a:p>
           <a:p>
@@ -19135,7 +19135,7 @@
                 <a:latin typeface="Malgun Gothic"/>
                 <a:ea typeface="Malgun Gothic"/>
               </a:rPr>
-              <a:t>장난감도</a:t>
+              <a:t>책도</a:t>
             </a:r>
           </a:p>
         </p:txBody>
@@ -19530,7 +19530,7 @@
                 <a:latin typeface="Malgun Gothic"/>
                 <a:ea typeface="Malgun Gothic"/>
               </a:rPr>
-              <a:t>레고를 생각해 보세요! 🧱</a:t>
+              <a:t>레고를 생각해 보세요! 🎲</a:t>
             </a:r>
           </a:p>
           <a:p>
@@ -19686,7 +19686,7 @@
                 <a:latin typeface="Malgun Gothic"/>
                 <a:ea typeface="Malgun Gothic"/>
               </a:rPr>
-              <a:t>원자는 얼마나 작을까? 🤏</a:t>
+              <a:t>원자는 얼마나 작을까? 🔍</a:t>
             </a:r>
           </a:p>
         </p:txBody>

--- a/강의자료/원자력 세상_초등 3-4학년용.pptx
+++ b/강의자료/원자력 세상_초등 3-4학년용.pptx
@@ -1469,7 +1469,7 @@
           </a:p>
           <a:p>
             <a:r>
-              <a:t>카드를 클릭하면 4분 이내의 짧은 영상만 골라서 보여주도록 되어 있어요. 그중에 그림이 예쁘고 쉬운 것을 하나 고르면 됩니다.</a:t>
+              <a:t>왼쪽 카드를 클릭하면 서울특별시교육청 융합과학교육원에서 만든 '원자력 발전의 원리와 발전소의 구조' 영상이 나와요. 교육청 선생님들이 학생들을 위해 만든 공식 영상이에요.</a:t>
             </a:r>
           </a:p>
           <a:p>
@@ -1479,7 +1479,7 @@
           </a:p>
           <a:p>
             <a:r>
-              <a:t>(수업 전에 영상을 미리 하나 골라 두세요. 검색 결과에는 '4분 이내' 필터가 걸려 있어요.)</a:t>
+              <a:t>(수업 전에 링크가 잘 열리는지 확인하고, 길면 필요한 부분만 보여줘도 좋아요.)</a:t>
             </a:r>
           </a:p>
           <a:p>
@@ -11893,7 +11893,7 @@
                 <a:latin typeface="Malgun Gothic"/>
                 <a:ea typeface="Malgun Gothic"/>
               </a:rPr>
-              <a:t>4분 이내 짧은 영상만 모았어요</a:t>
+              <a:t>서울특별시교육청 융합과학교육원</a:t>
             </a:r>
           </a:p>
           <a:p>
@@ -11913,7 +11913,7 @@
                 <a:latin typeface="Malgun Gothic"/>
                 <a:ea typeface="Malgun Gothic"/>
               </a:rPr>
-              <a:t>원자력 발전소는</a:t>
+              <a:t>원자력 발전의 원리와</a:t>
             </a:r>
             <a:br/>
             <a:r>
@@ -11924,7 +11924,7 @@
                 <a:latin typeface="Malgun Gothic"/>
                 <a:ea typeface="Malgun Gothic"/>
               </a:rPr>
-              <a:t>어떻게 전기를 만들까?</a:t>
+              <a:t>발전소의 구조</a:t>
             </a:r>
           </a:p>
           <a:p>
@@ -11944,7 +11944,7 @@
                 <a:latin typeface="Malgun Gothic"/>
                 <a:ea typeface="Malgun Gothic"/>
               </a:rPr>
-              <a:t>어린이 눈높이의 짧은 애니메이션만</a:t>
+              <a:t>교육청 선생님들이 만든 공식 영상!</a:t>
             </a:r>
             <a:br/>
             <a:r>
@@ -11955,7 +11955,7 @@
                 <a:latin typeface="Malgun Gothic"/>
                 <a:ea typeface="Malgun Gothic"/>
               </a:rPr>
-              <a:t>골라서 보여줘요</a:t>
+              <a:t>발전소 속을 차근차근 보여줘요</a:t>
             </a:r>
           </a:p>
         </p:txBody>
